--- a/Classes/Week 07 - Meshes & Brep/Class 07 - Meshes & BREPs.pptx
+++ b/Classes/Week 07 - Meshes & Brep/Class 07 - Meshes & BREPs.pptx
@@ -18,8 +18,8 @@
     <p:sldId id="291" r:id="rId9"/>
     <p:sldId id="293" r:id="rId10"/>
     <p:sldId id="292" r:id="rId11"/>
-    <p:sldId id="294" r:id="rId12"/>
-    <p:sldId id="295" r:id="rId13"/>
+    <p:sldId id="295" r:id="rId12"/>
+    <p:sldId id="294" r:id="rId13"/>
     <p:sldId id="298" r:id="rId14"/>
     <p:sldId id="300" r:id="rId15"/>
     <p:sldId id="301" r:id="rId16"/>
@@ -213,7 +213,7 @@
           <a:p>
             <a:fld id="{1C59E53E-DFF5-4F15-B4C8-D56550F347A2}" type="datetimeFigureOut">
               <a:rPr lang="en-US" smtClean="0"/>
-              <a:t>2/26/2025</a:t>
+              <a:t>3/10/2026</a:t>
             </a:fld>
             <a:endParaRPr lang="en-US"/>
           </a:p>
@@ -627,7 +627,7 @@
           <a:p>
             <a:fld id="{225C7FF1-2989-456F-8CD9-061F5D4C1D5B}" type="datetimeFigureOut">
               <a:rPr lang="en-US" smtClean="0"/>
-              <a:t>2/26/2025</a:t>
+              <a:t>3/10/2026</a:t>
             </a:fld>
             <a:endParaRPr lang="en-US"/>
           </a:p>
@@ -825,7 +825,7 @@
           <a:p>
             <a:fld id="{225C7FF1-2989-456F-8CD9-061F5D4C1D5B}" type="datetimeFigureOut">
               <a:rPr lang="en-US" smtClean="0"/>
-              <a:t>2/26/2025</a:t>
+              <a:t>3/10/2026</a:t>
             </a:fld>
             <a:endParaRPr lang="en-US"/>
           </a:p>
@@ -1033,7 +1033,7 @@
           <a:p>
             <a:fld id="{225C7FF1-2989-456F-8CD9-061F5D4C1D5B}" type="datetimeFigureOut">
               <a:rPr lang="en-US" smtClean="0"/>
-              <a:t>2/26/2025</a:t>
+              <a:t>3/10/2026</a:t>
             </a:fld>
             <a:endParaRPr lang="en-US"/>
           </a:p>
@@ -1231,7 +1231,7 @@
           <a:p>
             <a:fld id="{225C7FF1-2989-456F-8CD9-061F5D4C1D5B}" type="datetimeFigureOut">
               <a:rPr lang="en-US" smtClean="0"/>
-              <a:t>2/26/2025</a:t>
+              <a:t>3/10/2026</a:t>
             </a:fld>
             <a:endParaRPr lang="en-US"/>
           </a:p>
@@ -1506,7 +1506,7 @@
           <a:p>
             <a:fld id="{225C7FF1-2989-456F-8CD9-061F5D4C1D5B}" type="datetimeFigureOut">
               <a:rPr lang="en-US" smtClean="0"/>
-              <a:t>2/26/2025</a:t>
+              <a:t>3/10/2026</a:t>
             </a:fld>
             <a:endParaRPr lang="en-US"/>
           </a:p>
@@ -1771,7 +1771,7 @@
           <a:p>
             <a:fld id="{225C7FF1-2989-456F-8CD9-061F5D4C1D5B}" type="datetimeFigureOut">
               <a:rPr lang="en-US" smtClean="0"/>
-              <a:t>2/26/2025</a:t>
+              <a:t>3/10/2026</a:t>
             </a:fld>
             <a:endParaRPr lang="en-US"/>
           </a:p>
@@ -2183,7 +2183,7 @@
           <a:p>
             <a:fld id="{225C7FF1-2989-456F-8CD9-061F5D4C1D5B}" type="datetimeFigureOut">
               <a:rPr lang="en-US" smtClean="0"/>
-              <a:t>2/26/2025</a:t>
+              <a:t>3/10/2026</a:t>
             </a:fld>
             <a:endParaRPr lang="en-US"/>
           </a:p>
@@ -2324,7 +2324,7 @@
           <a:p>
             <a:fld id="{225C7FF1-2989-456F-8CD9-061F5D4C1D5B}" type="datetimeFigureOut">
               <a:rPr lang="en-US" smtClean="0"/>
-              <a:t>2/26/2025</a:t>
+              <a:t>3/10/2026</a:t>
             </a:fld>
             <a:endParaRPr lang="en-US"/>
           </a:p>
@@ -2437,7 +2437,7 @@
           <a:p>
             <a:fld id="{225C7FF1-2989-456F-8CD9-061F5D4C1D5B}" type="datetimeFigureOut">
               <a:rPr lang="en-US" smtClean="0"/>
-              <a:t>2/26/2025</a:t>
+              <a:t>3/10/2026</a:t>
             </a:fld>
             <a:endParaRPr lang="en-US"/>
           </a:p>
@@ -2748,7 +2748,7 @@
           <a:p>
             <a:fld id="{225C7FF1-2989-456F-8CD9-061F5D4C1D5B}" type="datetimeFigureOut">
               <a:rPr lang="en-US" smtClean="0"/>
-              <a:t>2/26/2025</a:t>
+              <a:t>3/10/2026</a:t>
             </a:fld>
             <a:endParaRPr lang="en-US"/>
           </a:p>
@@ -3036,7 +3036,7 @@
           <a:p>
             <a:fld id="{225C7FF1-2989-456F-8CD9-061F5D4C1D5B}" type="datetimeFigureOut">
               <a:rPr lang="en-US" smtClean="0"/>
-              <a:t>2/26/2025</a:t>
+              <a:t>3/10/2026</a:t>
             </a:fld>
             <a:endParaRPr lang="en-US"/>
           </a:p>
@@ -3277,7 +3277,7 @@
           <a:p>
             <a:fld id="{225C7FF1-2989-456F-8CD9-061F5D4C1D5B}" type="datetimeFigureOut">
               <a:rPr lang="en-US" smtClean="0"/>
-              <a:t>2/26/2025</a:t>
+              <a:t>3/10/2026</a:t>
             </a:fld>
             <a:endParaRPr lang="en-US"/>
           </a:p>
@@ -4273,7 +4273,13 @@
   <p:cSld>
     <p:spTree>
       <p:nvGrpSpPr>
-        <p:cNvPr id="1" name=""/>
+        <p:cNvPr id="1" name="">
+          <a:extLst>
+            <a:ext uri="{FF2B5EF4-FFF2-40B4-BE49-F238E27FC236}">
+              <a16:creationId xmlns:a16="http://schemas.microsoft.com/office/drawing/2014/main" id="{80D62B81-4139-A96C-E4E9-E512191E7130}"/>
+            </a:ext>
+          </a:extLst>
+        </p:cNvPr>
         <p:cNvGrpSpPr/>
         <p:nvPr/>
       </p:nvGrpSpPr>
@@ -4290,7 +4296,7 @@
           <p:cNvPr id="2" name="Title 1">
             <a:extLst>
               <a:ext uri="{FF2B5EF4-FFF2-40B4-BE49-F238E27FC236}">
-                <a16:creationId xmlns:a16="http://schemas.microsoft.com/office/drawing/2014/main" id="{068B19F5-2460-0DA6-73FC-86900A8325B5}"/>
+                <a16:creationId xmlns:a16="http://schemas.microsoft.com/office/drawing/2014/main" id="{8BAEA9C1-41AC-FABA-94DB-2B160C5641B7}"/>
               </a:ext>
             </a:extLst>
           </p:cNvPr>
@@ -4319,7 +4325,7 @@
                   <a:schemeClr val="accent1"/>
                 </a:solidFill>
               </a:rPr>
-              <a:t>OBJ Definition (“1 Ordered”)</a:t>
+              <a:t>STL Definition (“normal” – zero ordered)</a:t>
             </a:r>
           </a:p>
         </p:txBody>
@@ -4329,7 +4335,7 @@
           <p:cNvPr id="12" name="Picture 11">
             <a:extLst>
               <a:ext uri="{FF2B5EF4-FFF2-40B4-BE49-F238E27FC236}">
-                <a16:creationId xmlns:a16="http://schemas.microsoft.com/office/drawing/2014/main" id="{0958CC7E-F3AF-20F9-3149-3DBFEFC06013}"/>
+                <a16:creationId xmlns:a16="http://schemas.microsoft.com/office/drawing/2014/main" id="{B85159BF-A93C-768B-156B-0235C0304FBC}"/>
               </a:ext>
             </a:extLst>
           </p:cNvPr>
@@ -4365,12 +4371,52 @@
           </a:prstGeom>
         </p:spPr>
       </p:pic>
+      <p:sp>
+        <p:nvSpPr>
+          <p:cNvPr id="19" name="TextBox 18">
+            <a:extLst>
+              <a:ext uri="{FF2B5EF4-FFF2-40B4-BE49-F238E27FC236}">
+                <a16:creationId xmlns:a16="http://schemas.microsoft.com/office/drawing/2014/main" id="{BB6F0A89-576E-3A29-8A53-63168C28644A}"/>
+              </a:ext>
+            </a:extLst>
+          </p:cNvPr>
+          <p:cNvSpPr txBox="1"/>
+          <p:nvPr/>
+        </p:nvSpPr>
+        <p:spPr>
+          <a:xfrm>
+            <a:off x="8484868" y="703403"/>
+            <a:ext cx="1958340" cy="369332"/>
+          </a:xfrm>
+          <a:prstGeom prst="rect">
+            <a:avLst/>
+          </a:prstGeom>
+          <a:noFill/>
+        </p:spPr>
+        <p:txBody>
+          <a:bodyPr wrap="square">
+            <a:spAutoFit/>
+          </a:bodyPr>
+          <a:lstStyle/>
+          <a:p>
+            <a:r>
+              <a:rPr lang="en-US" sz="1800" b="1" dirty="0">
+                <a:solidFill>
+                  <a:schemeClr val="accent1"/>
+                </a:solidFill>
+              </a:rPr>
+              <a:t>.STL file</a:t>
+            </a:r>
+            <a:endParaRPr lang="en-US" dirty="0"/>
+          </a:p>
+        </p:txBody>
+      </p:sp>
       <p:pic>
         <p:nvPicPr>
-          <p:cNvPr id="14" name="Picture 13">
-            <a:extLst>
-              <a:ext uri="{FF2B5EF4-FFF2-40B4-BE49-F238E27FC236}">
-                <a16:creationId xmlns:a16="http://schemas.microsoft.com/office/drawing/2014/main" id="{318E04A7-76B8-7919-306E-77B64337B50A}"/>
+          <p:cNvPr id="4" name="Picture 3">
+            <a:extLst>
+              <a:ext uri="{FF2B5EF4-FFF2-40B4-BE49-F238E27FC236}">
+                <a16:creationId xmlns:a16="http://schemas.microsoft.com/office/drawing/2014/main" id="{8D427F9D-1502-7F4E-50B9-C8A384A2837B}"/>
               </a:ext>
             </a:extLst>
           </p:cNvPr>
@@ -4387,20 +4433,144 @@
         </p:blipFill>
         <p:spPr>
           <a:xfrm>
-            <a:off x="6096000" y="1072735"/>
-            <a:ext cx="3095105" cy="4681238"/>
+            <a:off x="8162362" y="1152207"/>
+            <a:ext cx="4029638" cy="4098227"/>
           </a:xfrm>
           <a:prstGeom prst="rect">
             <a:avLst/>
           </a:prstGeom>
         </p:spPr>
       </p:pic>
+    </p:spTree>
+    <p:extLst>
+      <p:ext uri="{BB962C8B-B14F-4D97-AF65-F5344CB8AC3E}">
+        <p14:creationId xmlns:p14="http://schemas.microsoft.com/office/powerpoint/2010/main" val="2755882344"/>
+      </p:ext>
+    </p:extLst>
+  </p:cSld>
+  <p:clrMapOvr>
+    <a:masterClrMapping/>
+  </p:clrMapOvr>
+</p:sld>
+</file>
+
+<file path=ppt/slides/slide12.xml><?xml version="1.0" encoding="utf-8"?>
+<p:sld xmlns:a="http://schemas.openxmlformats.org/drawingml/2006/main" xmlns:r="http://schemas.openxmlformats.org/officeDocument/2006/relationships" xmlns:p="http://schemas.openxmlformats.org/presentationml/2006/main">
+  <p:cSld>
+    <p:spTree>
+      <p:nvGrpSpPr>
+        <p:cNvPr id="1" name=""/>
+        <p:cNvGrpSpPr/>
+        <p:nvPr/>
+      </p:nvGrpSpPr>
+      <p:grpSpPr>
+        <a:xfrm>
+          <a:off x="0" y="0"/>
+          <a:ext cx="0" cy="0"/>
+          <a:chOff x="0" y="0"/>
+          <a:chExt cx="0" cy="0"/>
+        </a:xfrm>
+      </p:grpSpPr>
+      <p:sp>
+        <p:nvSpPr>
+          <p:cNvPr id="38" name="Rectangle 37">
+            <a:extLst>
+              <a:ext uri="{FF2B5EF4-FFF2-40B4-BE49-F238E27FC236}">
+                <a16:creationId xmlns:a16="http://schemas.microsoft.com/office/drawing/2014/main" id="{186CB52C-064F-C97B-2D3A-437CD832B11F}"/>
+              </a:ext>
+            </a:extLst>
+          </p:cNvPr>
+          <p:cNvSpPr/>
+          <p:nvPr/>
+        </p:nvSpPr>
+        <p:spPr>
+          <a:xfrm>
+            <a:off x="6476703" y="5240548"/>
+            <a:ext cx="2213780" cy="513425"/>
+          </a:xfrm>
+          <a:prstGeom prst="rect">
+            <a:avLst/>
+          </a:prstGeom>
+          <a:solidFill>
+            <a:schemeClr val="accent6">
+              <a:lumMod val="40000"/>
+              <a:lumOff val="60000"/>
+            </a:schemeClr>
+          </a:solidFill>
+          <a:ln>
+            <a:noFill/>
+          </a:ln>
+        </p:spPr>
+        <p:style>
+          <a:lnRef idx="2">
+            <a:schemeClr val="accent1">
+              <a:shade val="15000"/>
+            </a:schemeClr>
+          </a:lnRef>
+          <a:fillRef idx="1">
+            <a:schemeClr val="accent1"/>
+          </a:fillRef>
+          <a:effectRef idx="0">
+            <a:schemeClr val="accent1"/>
+          </a:effectRef>
+          <a:fontRef idx="minor">
+            <a:schemeClr val="lt1"/>
+          </a:fontRef>
+        </p:style>
+        <p:txBody>
+          <a:bodyPr rtlCol="0" anchor="ctr"/>
+          <a:lstStyle/>
+          <a:p>
+            <a:pPr algn="ctr"/>
+            <a:endParaRPr lang="en-US" dirty="0"/>
+          </a:p>
+        </p:txBody>
+      </p:sp>
+      <p:sp>
+        <p:nvSpPr>
+          <p:cNvPr id="2" name="Title 1">
+            <a:extLst>
+              <a:ext uri="{FF2B5EF4-FFF2-40B4-BE49-F238E27FC236}">
+                <a16:creationId xmlns:a16="http://schemas.microsoft.com/office/drawing/2014/main" id="{068B19F5-2460-0DA6-73FC-86900A8325B5}"/>
+              </a:ext>
+            </a:extLst>
+          </p:cNvPr>
+          <p:cNvSpPr>
+            <a:spLocks noGrp="1"/>
+          </p:cNvSpPr>
+          <p:nvPr>
+            <p:ph type="title"/>
+          </p:nvPr>
+        </p:nvSpPr>
+        <p:spPr>
+          <a:xfrm>
+            <a:off x="838200" y="365125"/>
+            <a:ext cx="10515600" cy="498475"/>
+          </a:xfrm>
+        </p:spPr>
+        <p:txBody>
+          <a:bodyPr>
+            <a:noAutofit/>
+          </a:bodyPr>
+          <a:lstStyle/>
+          <a:p>
+            <a:r>
+              <a:rPr lang="en-US" sz="3200" b="1" dirty="0">
+                <a:solidFill>
+                  <a:schemeClr val="accent1"/>
+                </a:solidFill>
+              </a:rPr>
+              <a:t>OBJ Definition (“1 Ordered”)</a:t>
+            </a:r>
+          </a:p>
+        </p:txBody>
+      </p:sp>
       <p:pic>
         <p:nvPicPr>
-          <p:cNvPr id="16" name="Picture 15">
-            <a:extLst>
-              <a:ext uri="{FF2B5EF4-FFF2-40B4-BE49-F238E27FC236}">
-                <a16:creationId xmlns:a16="http://schemas.microsoft.com/office/drawing/2014/main" id="{E5055E72-4598-1D3C-0DE3-753665687FED}"/>
+          <p:cNvPr id="14" name="Picture 13">
+            <a:extLst>
+              <a:ext uri="{FF2B5EF4-FFF2-40B4-BE49-F238E27FC236}">
+                <a16:creationId xmlns:a16="http://schemas.microsoft.com/office/drawing/2014/main" id="{318E04A7-76B8-7919-306E-77B64337B50A}"/>
               </a:ext>
             </a:extLst>
           </p:cNvPr>
@@ -4410,7 +4580,48 @@
           <p:nvPr/>
         </p:nvPicPr>
         <p:blipFill>
-          <a:blip r:embed="rId4"/>
+          <a:blip r:embed="rId2">
+            <a:clrChange>
+              <a:clrFrom>
+                <a:srgbClr val="FFFFFF"/>
+              </a:clrFrom>
+              <a:clrTo>
+                <a:srgbClr val="FFFFFF">
+                  <a:alpha val="0"/>
+                </a:srgbClr>
+              </a:clrTo>
+            </a:clrChange>
+          </a:blip>
+          <a:stretch>
+            <a:fillRect/>
+          </a:stretch>
+        </p:blipFill>
+        <p:spPr>
+          <a:xfrm>
+            <a:off x="6096000" y="1072735"/>
+            <a:ext cx="3095105" cy="4681238"/>
+          </a:xfrm>
+          <a:prstGeom prst="rect">
+            <a:avLst/>
+          </a:prstGeom>
+        </p:spPr>
+      </p:pic>
+      <p:pic>
+        <p:nvPicPr>
+          <p:cNvPr id="16" name="Picture 15">
+            <a:extLst>
+              <a:ext uri="{FF2B5EF4-FFF2-40B4-BE49-F238E27FC236}">
+                <a16:creationId xmlns:a16="http://schemas.microsoft.com/office/drawing/2014/main" id="{E5055E72-4598-1D3C-0DE3-753665687FED}"/>
+              </a:ext>
+            </a:extLst>
+          </p:cNvPr>
+          <p:cNvPicPr>
+            <a:picLocks noChangeAspect="1"/>
+          </p:cNvPicPr>
+          <p:nvPr/>
+        </p:nvPicPr>
+        <p:blipFill>
+          <a:blip r:embed="rId3"/>
           <a:stretch>
             <a:fillRect/>
           </a:stretch>
@@ -5160,87 +5371,12 @@
           </a:fontRef>
         </p:style>
       </p:cxnSp>
-    </p:spTree>
-    <p:extLst>
-      <p:ext uri="{BB962C8B-B14F-4D97-AF65-F5344CB8AC3E}">
-        <p14:creationId xmlns:p14="http://schemas.microsoft.com/office/powerpoint/2010/main" val="2528322328"/>
-      </p:ext>
-    </p:extLst>
-  </p:cSld>
-  <p:clrMapOvr>
-    <a:masterClrMapping/>
-  </p:clrMapOvr>
-</p:sld>
-</file>
-
-<file path=ppt/slides/slide12.xml><?xml version="1.0" encoding="utf-8"?>
-<p:sld xmlns:a="http://schemas.openxmlformats.org/drawingml/2006/main" xmlns:r="http://schemas.openxmlformats.org/officeDocument/2006/relationships" xmlns:p="http://schemas.openxmlformats.org/presentationml/2006/main">
-  <p:cSld>
-    <p:spTree>
-      <p:nvGrpSpPr>
-        <p:cNvPr id="1" name="">
-          <a:extLst>
-            <a:ext uri="{FF2B5EF4-FFF2-40B4-BE49-F238E27FC236}">
-              <a16:creationId xmlns:a16="http://schemas.microsoft.com/office/drawing/2014/main" id="{80D62B81-4139-A96C-E4E9-E512191E7130}"/>
-            </a:ext>
-          </a:extLst>
-        </p:cNvPr>
-        <p:cNvGrpSpPr/>
-        <p:nvPr/>
-      </p:nvGrpSpPr>
-      <p:grpSpPr>
-        <a:xfrm>
-          <a:off x="0" y="0"/>
-          <a:ext cx="0" cy="0"/>
-          <a:chOff x="0" y="0"/>
-          <a:chExt cx="0" cy="0"/>
-        </a:xfrm>
-      </p:grpSpPr>
-      <p:sp>
-        <p:nvSpPr>
-          <p:cNvPr id="2" name="Title 1">
-            <a:extLst>
-              <a:ext uri="{FF2B5EF4-FFF2-40B4-BE49-F238E27FC236}">
-                <a16:creationId xmlns:a16="http://schemas.microsoft.com/office/drawing/2014/main" id="{8BAEA9C1-41AC-FABA-94DB-2B160C5641B7}"/>
-              </a:ext>
-            </a:extLst>
-          </p:cNvPr>
-          <p:cNvSpPr>
-            <a:spLocks noGrp="1"/>
-          </p:cNvSpPr>
-          <p:nvPr>
-            <p:ph type="title"/>
-          </p:nvPr>
-        </p:nvSpPr>
-        <p:spPr>
-          <a:xfrm>
-            <a:off x="838200" y="365125"/>
-            <a:ext cx="10515600" cy="498475"/>
-          </a:xfrm>
-        </p:spPr>
-        <p:txBody>
-          <a:bodyPr>
-            <a:noAutofit/>
-          </a:bodyPr>
-          <a:lstStyle/>
-          <a:p>
-            <a:r>
-              <a:rPr lang="en-US" sz="3200" b="1" dirty="0">
-                <a:solidFill>
-                  <a:schemeClr val="accent1"/>
-                </a:solidFill>
-              </a:rPr>
-              <a:t>STL Definition</a:t>
-            </a:r>
-          </a:p>
-        </p:txBody>
-      </p:sp>
       <p:pic>
         <p:nvPicPr>
-          <p:cNvPr id="12" name="Picture 11">
-            <a:extLst>
-              <a:ext uri="{FF2B5EF4-FFF2-40B4-BE49-F238E27FC236}">
-                <a16:creationId xmlns:a16="http://schemas.microsoft.com/office/drawing/2014/main" id="{B85159BF-A93C-768B-156B-0235C0304FBC}"/>
+          <p:cNvPr id="10" name="Picture 9">
+            <a:extLst>
+              <a:ext uri="{FF2B5EF4-FFF2-40B4-BE49-F238E27FC236}">
+                <a16:creationId xmlns:a16="http://schemas.microsoft.com/office/drawing/2014/main" id="{E0B2E038-6DBA-83DF-142C-B3AED4F688EB}"/>
               </a:ext>
             </a:extLst>
           </p:cNvPr>
@@ -5250,26 +5386,15 @@
           <p:nvPr/>
         </p:nvPicPr>
         <p:blipFill>
-          <a:blip r:embed="rId2">
-            <a:clrChange>
-              <a:clrFrom>
-                <a:srgbClr val="9DA3AA"/>
-              </a:clrFrom>
-              <a:clrTo>
-                <a:srgbClr val="9DA3AA">
-                  <a:alpha val="0"/>
-                </a:srgbClr>
-              </a:clrTo>
-            </a:clrChange>
-          </a:blip>
+          <a:blip r:embed="rId4"/>
           <a:stretch>
             <a:fillRect/>
           </a:stretch>
         </p:blipFill>
         <p:spPr>
           <a:xfrm>
-            <a:off x="0" y="863601"/>
-            <a:ext cx="4564380" cy="4269904"/>
+            <a:off x="398962" y="1212507"/>
+            <a:ext cx="4566300" cy="4401693"/>
           </a:xfrm>
           <a:prstGeom prst="rect">
             <a:avLst/>
@@ -5278,10 +5403,10 @@
       </p:pic>
       <p:sp>
         <p:nvSpPr>
-          <p:cNvPr id="19" name="TextBox 18">
-            <a:extLst>
-              <a:ext uri="{FF2B5EF4-FFF2-40B4-BE49-F238E27FC236}">
-                <a16:creationId xmlns:a16="http://schemas.microsoft.com/office/drawing/2014/main" id="{BB6F0A89-576E-3A29-8A53-63168C28644A}"/>
+          <p:cNvPr id="11" name="TextBox 10">
+            <a:extLst>
+              <a:ext uri="{FF2B5EF4-FFF2-40B4-BE49-F238E27FC236}">
+                <a16:creationId xmlns:a16="http://schemas.microsoft.com/office/drawing/2014/main" id="{A4E7A06B-BA10-5A44-1727-17E0E22CCE45}"/>
               </a:ext>
             </a:extLst>
           </p:cNvPr>
@@ -5290,8 +5415,8 @@
         </p:nvSpPr>
         <p:spPr>
           <a:xfrm>
-            <a:off x="8484868" y="703403"/>
-            <a:ext cx="1958340" cy="369332"/>
+            <a:off x="1941534" y="2085584"/>
+            <a:ext cx="393056" cy="584775"/>
           </a:xfrm>
           <a:prstGeom prst="rect">
             <a:avLst/>
@@ -5299,57 +5424,221 @@
           <a:noFill/>
         </p:spPr>
         <p:txBody>
-          <a:bodyPr wrap="square">
+          <a:bodyPr wrap="none" rtlCol="0">
             <a:spAutoFit/>
           </a:bodyPr>
           <a:lstStyle/>
           <a:p>
             <a:r>
-              <a:rPr lang="en-US" sz="1800" b="1" dirty="0">
+              <a:rPr lang="en-US" sz="3200" dirty="0">
                 <a:solidFill>
-                  <a:schemeClr val="accent1"/>
+                  <a:srgbClr val="0070C0"/>
                 </a:solidFill>
               </a:rPr>
-              <a:t>.STL file</a:t>
-            </a:r>
-            <a:endParaRPr lang="en-US" dirty="0"/>
-          </a:p>
-        </p:txBody>
-      </p:sp>
-      <p:pic>
-        <p:nvPicPr>
-          <p:cNvPr id="4" name="Picture 3">
-            <a:extLst>
-              <a:ext uri="{FF2B5EF4-FFF2-40B4-BE49-F238E27FC236}">
-                <a16:creationId xmlns:a16="http://schemas.microsoft.com/office/drawing/2014/main" id="{8D427F9D-1502-7F4E-50B9-C8A384A2837B}"/>
-              </a:ext>
-            </a:extLst>
-          </p:cNvPr>
-          <p:cNvPicPr>
-            <a:picLocks noChangeAspect="1"/>
-          </p:cNvPicPr>
+              <a:t>1</a:t>
+            </a:r>
+          </a:p>
+        </p:txBody>
+      </p:sp>
+      <p:sp>
+        <p:nvSpPr>
+          <p:cNvPr id="17" name="TextBox 16">
+            <a:extLst>
+              <a:ext uri="{FF2B5EF4-FFF2-40B4-BE49-F238E27FC236}">
+                <a16:creationId xmlns:a16="http://schemas.microsoft.com/office/drawing/2014/main" id="{A21C9028-3D2B-D2F6-2009-E4D3AF91BF83}"/>
+              </a:ext>
+            </a:extLst>
+          </p:cNvPr>
+          <p:cNvSpPr txBox="1"/>
           <p:nvPr/>
-        </p:nvPicPr>
-        <p:blipFill>
-          <a:blip r:embed="rId3"/>
-          <a:stretch>
-            <a:fillRect/>
-          </a:stretch>
-        </p:blipFill>
-        <p:spPr>
-          <a:xfrm>
-            <a:off x="8162362" y="1152207"/>
-            <a:ext cx="4029638" cy="4098227"/>
+        </p:nvSpPr>
+        <p:spPr>
+          <a:xfrm>
+            <a:off x="2993520" y="3390611"/>
+            <a:ext cx="393056" cy="584775"/>
           </a:xfrm>
           <a:prstGeom prst="rect">
             <a:avLst/>
           </a:prstGeom>
-        </p:spPr>
-      </p:pic>
+          <a:noFill/>
+        </p:spPr>
+        <p:txBody>
+          <a:bodyPr wrap="none" rtlCol="0">
+            <a:spAutoFit/>
+          </a:bodyPr>
+          <a:lstStyle/>
+          <a:p>
+            <a:r>
+              <a:rPr lang="en-US" sz="3200" dirty="0">
+                <a:solidFill>
+                  <a:srgbClr val="0070C0"/>
+                </a:solidFill>
+              </a:rPr>
+              <a:t>2</a:t>
+            </a:r>
+          </a:p>
+        </p:txBody>
+      </p:sp>
+      <p:sp>
+        <p:nvSpPr>
+          <p:cNvPr id="31" name="TextBox 30">
+            <a:extLst>
+              <a:ext uri="{FF2B5EF4-FFF2-40B4-BE49-F238E27FC236}">
+                <a16:creationId xmlns:a16="http://schemas.microsoft.com/office/drawing/2014/main" id="{B120DBFE-94C4-301A-0281-1B2B0F874CE0}"/>
+              </a:ext>
+            </a:extLst>
+          </p:cNvPr>
+          <p:cNvSpPr txBox="1"/>
+          <p:nvPr/>
+        </p:nvSpPr>
+        <p:spPr>
+          <a:xfrm>
+            <a:off x="641672" y="4436793"/>
+            <a:ext cx="393056" cy="584775"/>
+          </a:xfrm>
+          <a:prstGeom prst="rect">
+            <a:avLst/>
+          </a:prstGeom>
+          <a:noFill/>
+        </p:spPr>
+        <p:txBody>
+          <a:bodyPr wrap="none" rtlCol="0">
+            <a:spAutoFit/>
+          </a:bodyPr>
+          <a:lstStyle/>
+          <a:p>
+            <a:r>
+              <a:rPr lang="en-US" sz="3200" dirty="0">
+                <a:solidFill>
+                  <a:srgbClr val="00B050"/>
+                </a:solidFill>
+              </a:rPr>
+              <a:t>1</a:t>
+            </a:r>
+          </a:p>
+        </p:txBody>
+      </p:sp>
+      <p:sp>
+        <p:nvSpPr>
+          <p:cNvPr id="33" name="TextBox 32">
+            <a:extLst>
+              <a:ext uri="{FF2B5EF4-FFF2-40B4-BE49-F238E27FC236}">
+                <a16:creationId xmlns:a16="http://schemas.microsoft.com/office/drawing/2014/main" id="{87CE03CD-AE06-FAEA-3377-68C5F6D07137}"/>
+              </a:ext>
+            </a:extLst>
+          </p:cNvPr>
+          <p:cNvSpPr txBox="1"/>
+          <p:nvPr/>
+        </p:nvSpPr>
+        <p:spPr>
+          <a:xfrm>
+            <a:off x="512236" y="1463734"/>
+            <a:ext cx="393056" cy="584775"/>
+          </a:xfrm>
+          <a:prstGeom prst="rect">
+            <a:avLst/>
+          </a:prstGeom>
+          <a:noFill/>
+        </p:spPr>
+        <p:txBody>
+          <a:bodyPr wrap="none" rtlCol="0">
+            <a:spAutoFit/>
+          </a:bodyPr>
+          <a:lstStyle/>
+          <a:p>
+            <a:r>
+              <a:rPr lang="en-US" sz="3200" dirty="0">
+                <a:solidFill>
+                  <a:srgbClr val="00B050"/>
+                </a:solidFill>
+              </a:rPr>
+              <a:t>2</a:t>
+            </a:r>
+          </a:p>
+        </p:txBody>
+      </p:sp>
+      <p:sp>
+        <p:nvSpPr>
+          <p:cNvPr id="34" name="TextBox 33">
+            <a:extLst>
+              <a:ext uri="{FF2B5EF4-FFF2-40B4-BE49-F238E27FC236}">
+                <a16:creationId xmlns:a16="http://schemas.microsoft.com/office/drawing/2014/main" id="{6E320F75-2C71-6C58-D729-9DB0FE6EC0CC}"/>
+              </a:ext>
+            </a:extLst>
+          </p:cNvPr>
+          <p:cNvSpPr txBox="1"/>
+          <p:nvPr/>
+        </p:nvSpPr>
+        <p:spPr>
+          <a:xfrm>
+            <a:off x="3656269" y="1243800"/>
+            <a:ext cx="393056" cy="584775"/>
+          </a:xfrm>
+          <a:prstGeom prst="rect">
+            <a:avLst/>
+          </a:prstGeom>
+          <a:noFill/>
+        </p:spPr>
+        <p:txBody>
+          <a:bodyPr wrap="none" rtlCol="0">
+            <a:spAutoFit/>
+          </a:bodyPr>
+          <a:lstStyle/>
+          <a:p>
+            <a:r>
+              <a:rPr lang="en-US" sz="3200" dirty="0">
+                <a:solidFill>
+                  <a:srgbClr val="00B050"/>
+                </a:solidFill>
+              </a:rPr>
+              <a:t>4</a:t>
+            </a:r>
+          </a:p>
+        </p:txBody>
+      </p:sp>
+      <p:sp>
+        <p:nvSpPr>
+          <p:cNvPr id="37" name="TextBox 36">
+            <a:extLst>
+              <a:ext uri="{FF2B5EF4-FFF2-40B4-BE49-F238E27FC236}">
+                <a16:creationId xmlns:a16="http://schemas.microsoft.com/office/drawing/2014/main" id="{E9C0E6E3-CCC9-BA51-3D37-F0020FD9F51A}"/>
+              </a:ext>
+            </a:extLst>
+          </p:cNvPr>
+          <p:cNvSpPr txBox="1"/>
+          <p:nvPr/>
+        </p:nvSpPr>
+        <p:spPr>
+          <a:xfrm>
+            <a:off x="4191013" y="4436792"/>
+            <a:ext cx="393056" cy="584775"/>
+          </a:xfrm>
+          <a:prstGeom prst="rect">
+            <a:avLst/>
+          </a:prstGeom>
+          <a:noFill/>
+        </p:spPr>
+        <p:txBody>
+          <a:bodyPr wrap="none" rtlCol="0">
+            <a:spAutoFit/>
+          </a:bodyPr>
+          <a:lstStyle/>
+          <a:p>
+            <a:r>
+              <a:rPr lang="en-US" sz="3200" dirty="0">
+                <a:solidFill>
+                  <a:srgbClr val="00B050"/>
+                </a:solidFill>
+              </a:rPr>
+              <a:t>3</a:t>
+            </a:r>
+          </a:p>
+        </p:txBody>
+      </p:sp>
     </p:spTree>
     <p:extLst>
       <p:ext uri="{BB962C8B-B14F-4D97-AF65-F5344CB8AC3E}">
-        <p14:creationId xmlns:p14="http://schemas.microsoft.com/office/powerpoint/2010/main" val="2755882344"/>
+        <p14:creationId xmlns:p14="http://schemas.microsoft.com/office/powerpoint/2010/main" val="2528322328"/>
       </p:ext>
     </p:extLst>
   </p:cSld>

--- a/Classes/Week 07 - Meshes & Brep/Class 07 - Meshes & BREPs.pptx
+++ b/Classes/Week 07 - Meshes & Brep/Class 07 - Meshes & BREPs.pptx
@@ -8023,6 +8023,78 @@
           </a:p>
           <a:p>
             <a:endParaRPr lang="en-US" dirty="0"/>
+          </a:p>
+        </p:txBody>
+      </p:sp>
+      <p:sp>
+        <p:nvSpPr>
+          <p:cNvPr id="4" name="Isosceles Triangle 3">
+            <a:extLst>
+              <a:ext uri="{FF2B5EF4-FFF2-40B4-BE49-F238E27FC236}">
+                <a16:creationId xmlns:a16="http://schemas.microsoft.com/office/drawing/2014/main" id="{77929112-BA85-AFF9-121B-D155AF654B44}"/>
+              </a:ext>
+            </a:extLst>
+          </p:cNvPr>
+          <p:cNvSpPr/>
+          <p:nvPr/>
+        </p:nvSpPr>
+        <p:spPr>
+          <a:xfrm>
+            <a:off x="7736219" y="1841957"/>
+            <a:ext cx="2762935" cy="2124829"/>
+          </a:xfrm>
+          <a:prstGeom prst="triangle">
+            <a:avLst/>
+          </a:prstGeom>
+          <a:gradFill flip="none" rotWithShape="1">
+            <a:gsLst>
+              <a:gs pos="0">
+                <a:schemeClr val="accent1">
+                  <a:tint val="66000"/>
+                  <a:satMod val="160000"/>
+                </a:schemeClr>
+              </a:gs>
+              <a:gs pos="50000">
+                <a:schemeClr val="accent1">
+                  <a:tint val="44500"/>
+                  <a:satMod val="160000"/>
+                </a:schemeClr>
+              </a:gs>
+              <a:gs pos="100000">
+                <a:schemeClr val="accent1">
+                  <a:tint val="23500"/>
+                  <a:satMod val="160000"/>
+                </a:schemeClr>
+              </a:gs>
+            </a:gsLst>
+            <a:path path="circle">
+              <a:fillToRect l="100000" b="100000"/>
+            </a:path>
+            <a:tileRect t="-100000" r="-100000"/>
+          </a:gradFill>
+        </p:spPr>
+        <p:style>
+          <a:lnRef idx="2">
+            <a:schemeClr val="accent1">
+              <a:shade val="15000"/>
+            </a:schemeClr>
+          </a:lnRef>
+          <a:fillRef idx="1">
+            <a:schemeClr val="accent1"/>
+          </a:fillRef>
+          <a:effectRef idx="0">
+            <a:schemeClr val="accent1"/>
+          </a:effectRef>
+          <a:fontRef idx="minor">
+            <a:schemeClr val="lt1"/>
+          </a:fontRef>
+        </p:style>
+        <p:txBody>
+          <a:bodyPr rtlCol="0" anchor="ctr"/>
+          <a:lstStyle/>
+          <a:p>
+            <a:pPr algn="ctr"/>
+            <a:endParaRPr lang="en-US"/>
           </a:p>
         </p:txBody>
       </p:sp>
